--- a/Dia 1.pptx
+++ b/Dia 1.pptx
@@ -9925,7 +9925,7 @@
                 <a:ea typeface="Roboto" panose="02000000000000000000" pitchFamily="2" charset="0"/>
                 <a:cs typeface="Times New Roman" panose="02020603050405020304" pitchFamily="18" charset="0"/>
               </a:rPr>
-              <a:t>La primera forma normal se basa en cuatro premisas fundamentales:</a:t>
+              <a:t>La primera forma normal se basa las siguientes premisas:</a:t>
             </a:r>
           </a:p>
           <a:p>
